--- a/public/fun/pack/pptx/familypro/가족소개프리미엄_42_아이와함께_제이드실버.pptx
+++ b/public/fun/pack/pptx/familypro/가족소개프리미엄_42_아이와함께_제이드실버.pptx
@@ -113,12 +113,12 @@
   <p:extLst>
     <p:ext uri="{521415D9-36F7-43E2-AB2F-B90AF26B5E84}">
       <p14:sectionLst xmlns:p14="http://schemas.microsoft.com/office/powerpoint/2010/main">
-        <p14:section name="시작" id="{84754F20-C2A9-4020-83C4-E4D30306EB4C}">
+        <p14:section name="시작" id="{FA640BE5-CAC1-421B-B196-E79B7CDE17AD}">
           <p14:sldIdLst>
             <p14:sldId id="256"/>
           </p14:sldIdLst>
         </p14:section>
-        <p14:section name="본문" id="{5DF92185-C74D-444C-8D36-FD4D53971705}">
+        <p14:section name="본문" id="{0DC89A31-69D8-4EC0-8EB8-806E9AAFEC38}">
           <p14:sldIdLst>
             <p14:sldId id="257"/>
             <p14:sldId id="258"/>
@@ -127,7 +127,7 @@
             <p14:sldId id="261"/>
           </p14:sldIdLst>
         </p14:section>
-        <p14:section name="마무리" id="{9C38AFFF-435D-43A4-97A2-DE6F1A1A18DF}">
+        <p14:section name="마무리" id="{51447906-86CB-439A-AEDE-CB51A3EA05CC}">
           <p14:sldIdLst>
             <p14:sldId id="262"/>
           </p14:sldIdLst>
@@ -1513,7 +1513,7 @@
             </a:lvl1pPr>
           </a:lstStyle>
           <a:p>
-            <a:fld id="{D8F22296-272E-414E-A651-F78929DC29A8}" type="slidenum">
+            <a:fld id="{62A49AC7-98AA-450C-AFFA-93A9885AEE4B}" type="slidenum">
               <a:rPr lang="en-US"/>
               <a:t>‹#›</a:t>
             </a:fld>
@@ -2239,7 +2239,7 @@
             </a:lvl1pPr>
           </a:lstStyle>
           <a:p>
-            <a:fld id="{D716995B-9D34-4AC0-B3B8-704120401DD8}" type="slidenum">
+            <a:fld id="{AA780D6A-2A60-4543-BB51-FF67A088A1CC}" type="slidenum">
               <a:rPr lang="en-US"/>
               <a:t>‹#›</a:t>
             </a:fld>
@@ -2992,7 +2992,7 @@
             </a:lvl1pPr>
           </a:lstStyle>
           <a:p>
-            <a:fld id="{E58263BA-4EDA-4600-935E-21ECD92E4FE7}" type="slidenum">
+            <a:fld id="{9D2428CB-048C-4DDF-B39C-0C609F8AB2B2}" type="slidenum">
               <a:rPr lang="en-US"/>
               <a:t>‹#›</a:t>
             </a:fld>
@@ -3947,7 +3947,7 @@
           <a:p>
             <a:r>
               <a:rPr lang="ko-KR"/>
-              <a:t>눈 속 동백 앞에서 아이와</a:t>
+              <a:t>붉은 동백 앞에서 아이와</a:t>
             </a:r>
           </a:p>
         </p:txBody>
@@ -3969,7 +3969,7 @@
           <a:p>
             <a:r>
               <a:rPr lang="ko-KR"/>
-              <a:t>아이와 함께 · 0000. 00. 00</a:t>
+              <a:t>아이와 함께 · 날짜 입력</a:t>
             </a:r>
           </a:p>
         </p:txBody>
@@ -4350,7 +4350,7 @@
           <a:bodyPr/>
           <a:lstStyle/>
           <a:p>
-            <a:fld id="{33197F67-5C76-42C7-97B7-E662D109EF81}" type="slidenum">
+            <a:fld id="{5C45E8A1-490D-468F-994B-8AA076BEA9E6}" type="slidenum">
               <a:rPr lang="en-US"/>
               <a:t>‹#›</a:t>
             </a:fld>
@@ -5162,7 +5162,7 @@
           <a:bodyPr/>
           <a:lstStyle/>
           <a:p>
-            <a:fld id="{2DF25688-D8AD-417B-BA6E-8C9D169AD497}" type="slidenum">
+            <a:fld id="{217BF67A-68B8-4746-8064-9FC92C6863AA}" type="slidenum">
               <a:rPr lang="en-US"/>
               <a:t>‹#›</a:t>
             </a:fld>
@@ -6137,7 +6137,7 @@
           <a:bodyPr/>
           <a:lstStyle/>
           <a:p>
-            <a:fld id="{E5E123A5-5249-4C4F-B35F-9178F46C04B6}" type="slidenum">
+            <a:fld id="{D87BD8E5-455C-486C-9DB6-D0B487CD88DF}" type="slidenum">
               <a:rPr lang="en-US"/>
               <a:t>‹#›</a:t>
             </a:fld>
@@ -7461,7 +7461,7 @@
           <a:bodyPr/>
           <a:lstStyle/>
           <a:p>
-            <a:fld id="{B24BA2CE-C60E-4F73-910B-23D3E82475EF}" type="slidenum">
+            <a:fld id="{857FAC38-C659-4B5B-A732-AE0258293A5C}" type="slidenum">
               <a:rPr lang="en-US"/>
               <a:t>‹#›</a:t>
             </a:fld>
@@ -7549,7 +7549,7 @@
           <a:bodyPr/>
           <a:lstStyle/>
           <a:p>
-            <a:fld id="{6211CD2B-57CE-4535-A003-97D07147F6CE}" type="slidenum">
+            <a:fld id="{FC7B08B3-9DE4-4305-8D9A-80BA8960CA00}" type="slidenum">
               <a:rPr lang="en-US"/>
               <a:t>‹#›</a:t>
             </a:fld>
